--- a/02 Osnove Informacione Bezbednosti/02 Prezentacije/PPTX/05_MFA_sesije_servisi_i_tajne.pptx
+++ b/02 Osnove Informacione Bezbednosti/02 Prezentacije/PPTX/05_MFA_sesije_servisi_i_tajne.pptx
@@ -7194,7 +7194,7 @@
                 <a:ea typeface="Aptos Display"/>
                 <a:cs typeface="Aptos Display"/>
               </a:rPr>
-              <a:t>Step-up не замењује проверу сесије и дозволе</a:t>
+              <a:t>Step-up не замењује проверу сесије</a:t>
             </a:r>
           </a:p>
         </p:txBody>
@@ -7255,7 +7255,7 @@
                 <a:ea typeface="Aptos"/>
                 <a:cs typeface="Aptos"/>
               </a:rPr>
-              <a:t>Додатна потврда идентитета примењује се уз проверу важења сесије и потребне дозволе.</a:t>
+              <a:t>Додатна потврда идентитета вреди само уз важећу сесију и довољно свежу MFA потврду.</a:t>
             </a:r>
           </a:p>
         </p:txBody>
@@ -7277,7 +7277,7 @@
         <p:spPr>
           <a:xfrm xmlns:a="http://schemas.openxmlformats.org/drawingml/2006/main">
             <a:off x="666750" y="2095500"/>
-            <a:ext cx="6858000" cy="2352675"/>
+            <a:ext cx="6858000" cy="2482350"/>
           </a:xfrm>
           <a:prstGeom xmlns:a="http://schemas.openxmlformats.org/drawingml/2006/main" prst="roundRect">
             <a:avLst>
@@ -7459,7 +7459,7 @@
           <a:p xmlns:a="http://schemas.openxmlformats.org/drawingml/2006/main">
             <a:pPr algn="r">
               <a:lnSpc>
-                <a:spcPct val="100000"/>
+                <a:spcPts val="1300"/>
               </a:lnSpc>
               <a:buNone/>
               <a:defRPr sz="975" b="0">
@@ -7486,7 +7486,7 @@
           <a:p xmlns:a="http://schemas.openxmlformats.org/drawingml/2006/main">
             <a:pPr algn="r">
               <a:lnSpc>
-                <a:spcPct val="100000"/>
+                <a:spcPts val="1300"/>
               </a:lnSpc>
               <a:buNone/>
               <a:defRPr sz="975" b="0">
@@ -7513,7 +7513,7 @@
           <a:p xmlns:a="http://schemas.openxmlformats.org/drawingml/2006/main">
             <a:pPr algn="r">
               <a:lnSpc>
-                <a:spcPct val="100000"/>
+                <a:spcPts val="1300"/>
               </a:lnSpc>
               <a:buNone/>
               <a:defRPr sz="975" b="0">
@@ -7540,7 +7540,7 @@
           <a:p xmlns:a="http://schemas.openxmlformats.org/drawingml/2006/main">
             <a:pPr algn="r">
               <a:lnSpc>
-                <a:spcPct val="100000"/>
+                <a:spcPts val="1300"/>
               </a:lnSpc>
               <a:buNone/>
               <a:defRPr sz="975" b="0">
@@ -7567,7 +7567,7 @@
           <a:p xmlns:a="http://schemas.openxmlformats.org/drawingml/2006/main">
             <a:pPr algn="r">
               <a:lnSpc>
-                <a:spcPct val="100000"/>
+                <a:spcPts val="1300"/>
               </a:lnSpc>
               <a:buNone/>
               <a:defRPr sz="975" b="0">
@@ -7594,7 +7594,7 @@
           <a:p xmlns:a="http://schemas.openxmlformats.org/drawingml/2006/main">
             <a:pPr algn="r">
               <a:lnSpc>
-                <a:spcPct val="100000"/>
+                <a:spcPts val="1300"/>
               </a:lnSpc>
               <a:buNone/>
               <a:defRPr sz="975" b="0">
@@ -7621,7 +7621,7 @@
           <a:p xmlns:a="http://schemas.openxmlformats.org/drawingml/2006/main">
             <a:pPr algn="r">
               <a:lnSpc>
-                <a:spcPct val="100000"/>
+                <a:spcPts val="1300"/>
               </a:lnSpc>
               <a:buNone/>
               <a:defRPr sz="975" b="0">
@@ -7648,7 +7648,7 @@
           <a:p xmlns:a="http://schemas.openxmlformats.org/drawingml/2006/main">
             <a:pPr algn="r">
               <a:lnSpc>
-                <a:spcPct val="100000"/>
+                <a:spcPts val="1300"/>
               </a:lnSpc>
               <a:buNone/>
               <a:defRPr sz="975" b="0">
@@ -7675,7 +7675,7 @@
           <a:p xmlns:a="http://schemas.openxmlformats.org/drawingml/2006/main">
             <a:pPr algn="r">
               <a:lnSpc>
-                <a:spcPct val="100000"/>
+                <a:spcPts val="1300"/>
               </a:lnSpc>
               <a:buNone/>
               <a:defRPr sz="975" b="0">
@@ -7702,7 +7702,7 @@
           <a:p xmlns:a="http://schemas.openxmlformats.org/drawingml/2006/main">
             <a:pPr algn="r">
               <a:lnSpc>
-                <a:spcPct val="100000"/>
+                <a:spcPts val="1300"/>
               </a:lnSpc>
               <a:buNone/>
               <a:defRPr sz="975" b="0">
@@ -7726,6 +7726,33 @@
               <a:t>10</a:t>
             </a:r>
           </a:p>
+          <a:p xmlns:a="http://schemas.openxmlformats.org/drawingml/2006/main">
+            <a:pPr algn="r">
+              <a:lnSpc>
+                <a:spcPts val="1300"/>
+              </a:lnSpc>
+              <a:buNone/>
+              <a:defRPr sz="975" b="0">
+                <a:solidFill>
+                  <a:srgbClr val="8792A6"/>
+                </a:solidFill>
+                <a:latin typeface="Consolas"/>
+                <a:ea typeface="Consolas"/>
+                <a:cs typeface="Consolas"/>
+              </a:defRPr>
+            </a:pPr>
+            <a:r>
+              <a:rPr sz="975" b="0">
+                <a:solidFill>
+                  <a:srgbClr val="8792A6"/>
+                </a:solidFill>
+                <a:latin typeface="Consolas"/>
+                <a:ea typeface="Consolas"/>
+                <a:cs typeface="Consolas"/>
+              </a:rPr>
+              <a:t>11</a:t>
+            </a:r>
+          </a:p>
         </p:txBody>
       </p:sp>
       <p:sp>
@@ -7762,6 +7789,9 @@
           <a:lstStyle xmlns:a="http://schemas.openxmlformats.org/drawingml/2006/main"/>
           <a:p xmlns:a="http://schemas.openxmlformats.org/drawingml/2006/main">
             <a:pPr>
+              <a:lnSpc>
+                <a:spcPts val="1300"/>
+              </a:lnSpc>
               <a:buNone/>
               <a:defRPr sz="1050">
                 <a:solidFill>
@@ -7794,7 +7824,7 @@
                   <a:srgbClr val="7651D4"/>
                 </a:solidFill>
               </a:rPr>
-              <a:t>Result</a:t>
+              <a:t>StepUpDecision</a:t>
             </a:r>
             <a:r>
               <a:rPr b="0">
@@ -7810,7 +7840,7 @@
                   <a:srgbClr val="7651D4"/>
                 </a:solidFill>
               </a:rPr>
-              <a:t>Approve</a:t>
+              <a:t>Evaluate</a:t>
             </a:r>
             <a:r>
               <a:rPr b="0">
@@ -7820,41 +7850,12 @@
               </a:rPr>
               <a:t>(</a:t>
             </a:r>
-            <a:r>
-              <a:rPr b="0">
-                <a:solidFill>
-                  <a:srgbClr val="7651D4"/>
-                </a:solidFill>
-              </a:rPr>
-              <a:t>Session</a:t>
-            </a:r>
-            <a:r>
-              <a:rPr b="0">
-                <a:solidFill>
-                  <a:srgbClr val="263044"/>
-                </a:solidFill>
-              </a:rPr>
-              <a:t> session, </a:t>
-            </a:r>
-            <a:r>
-              <a:rPr b="0">
-                <a:solidFill>
-                  <a:srgbClr val="7651D4"/>
-                </a:solidFill>
-              </a:rPr>
-              <a:t>MfaProof</a:t>
-            </a:r>
-            <a:r>
-              <a:rPr b="0">
-                <a:solidFill>
-                  <a:srgbClr val="263044"/>
-                </a:solidFill>
-              </a:rPr>
-              <a:t> proof)</a:t>
-            </a:r>
           </a:p>
           <a:p xmlns:a="http://schemas.openxmlformats.org/drawingml/2006/main">
             <a:pPr>
+              <a:lnSpc>
+                <a:spcPts val="1300"/>
+              </a:lnSpc>
               <a:buNone/>
               <a:defRPr sz="1050">
                 <a:solidFill>
@@ -7871,11 +7872,62 @@
                   <a:srgbClr val="263044"/>
                 </a:solidFill>
               </a:rPr>
-              <a:t>{</a:t>
+              <a:t>    </a:t>
+            </a:r>
+            <a:r>
+              <a:rPr b="0">
+                <a:solidFill>
+                  <a:srgbClr val="7651D4"/>
+                </a:solidFill>
+              </a:rPr>
+              <a:t>AuthSession</a:t>
+            </a:r>
+            <a:r>
+              <a:rPr b="0">
+                <a:solidFill>
+                  <a:srgbClr val="263044"/>
+                </a:solidFill>
+              </a:rPr>
+              <a:t> session, </a:t>
+            </a:r>
+            <a:r>
+              <a:rPr b="0">
+                <a:solidFill>
+                  <a:srgbClr val="7651D4"/>
+                </a:solidFill>
+              </a:rPr>
+              <a:t>RiskyOperation</a:t>
+            </a:r>
+            <a:r>
+              <a:rPr b="0">
+                <a:solidFill>
+                  <a:srgbClr val="263044"/>
+                </a:solidFill>
+              </a:rPr>
+              <a:t> operation, </a:t>
+            </a:r>
+            <a:r>
+              <a:rPr b="0">
+                <a:solidFill>
+                  <a:srgbClr val="7651D4"/>
+                </a:solidFill>
+              </a:rPr>
+              <a:t>DateTimeOffset</a:t>
+            </a:r>
+            <a:r>
+              <a:rPr b="0">
+                <a:solidFill>
+                  <a:srgbClr val="263044"/>
+                </a:solidFill>
+              </a:rPr>
+              <a:t> now)</a:t>
             </a:r>
           </a:p>
           <a:p xmlns:a="http://schemas.openxmlformats.org/drawingml/2006/main">
             <a:pPr>
+              <a:lnSpc>
+                <a:spcPts val="1300"/>
+              </a:lnSpc>
               <a:buNone/>
               <a:defRPr sz="1050">
                 <a:solidFill>
@@ -7892,59 +7944,14 @@
                   <a:srgbClr val="263044"/>
                 </a:solidFill>
               </a:rPr>
-              <a:t>    </a:t>
-            </a:r>
-            <a:r>
-              <a:rPr b="1">
-                <a:solidFill>
-                  <a:srgbClr val="0969C3"/>
-                </a:solidFill>
-              </a:rPr>
-              <a:t>if</a:t>
-            </a:r>
-            <a:r>
-              <a:rPr b="0">
-                <a:solidFill>
-                  <a:srgbClr val="263044"/>
-                </a:solidFill>
-              </a:rPr>
-              <a:t> (session.</a:t>
-            </a:r>
-            <a:r>
-              <a:rPr b="0">
-                <a:solidFill>
-                  <a:srgbClr val="7651D4"/>
-                </a:solidFill>
-              </a:rPr>
-              <a:t>IsExpired</a:t>
-            </a:r>
-            <a:r>
-              <a:rPr b="0">
-                <a:solidFill>
-                  <a:srgbClr val="263044"/>
-                </a:solidFill>
-              </a:rPr>
-              <a:t> || session.</a:t>
-            </a:r>
-            <a:r>
-              <a:rPr b="0">
-                <a:solidFill>
-                  <a:srgbClr val="7651D4"/>
-                </a:solidFill>
-              </a:rPr>
-              <a:t>IsRevoked</a:t>
-            </a:r>
-            <a:r>
-              <a:rPr b="0">
-                <a:solidFill>
-                  <a:srgbClr val="263044"/>
-                </a:solidFill>
-              </a:rPr>
-              <a:t>)</a:t>
+              <a:t>{</a:t>
             </a:r>
           </a:p>
           <a:p xmlns:a="http://schemas.openxmlformats.org/drawingml/2006/main">
             <a:pPr>
+              <a:lnSpc>
+                <a:spcPts val="1300"/>
+              </a:lnSpc>
               <a:buNone/>
               <a:defRPr sz="1050">
                 <a:solidFill>
@@ -7961,7 +7968,7 @@
                   <a:srgbClr val="263044"/>
                 </a:solidFill>
               </a:rPr>
-              <a:t>        </a:t>
+              <a:t>    </a:t>
             </a:r>
             <a:r>
               <a:rPr b="1">
@@ -7969,7 +7976,7 @@
                   <a:srgbClr val="0969C3"/>
                 </a:solidFill>
               </a:rPr>
-              <a:t>return</a:t>
+              <a:t>if</a:t>
             </a:r>
             <a:r>
               <a:rPr b="0">
@@ -7977,7 +7984,7 @@
                   <a:srgbClr val="263044"/>
                 </a:solidFill>
               </a:rPr>
-              <a:t> </a:t>
+              <a:t> (session.</a:t>
             </a:r>
             <a:r>
               <a:rPr b="0">
@@ -7985,7 +7992,7 @@
                   <a:srgbClr val="7651D4"/>
                 </a:solidFill>
               </a:rPr>
-              <a:t>Result</a:t>
+              <a:t>Revoked</a:t>
             </a:r>
             <a:r>
               <a:rPr b="0">
@@ -7993,43 +8000,14 @@
                   <a:srgbClr val="263044"/>
                 </a:solidFill>
               </a:rPr>
-              <a:t>.</a:t>
-            </a:r>
-            <a:r>
-              <a:rPr b="0">
-                <a:solidFill>
-                  <a:srgbClr val="7651D4"/>
-                </a:solidFill>
-              </a:rPr>
-              <a:t>Deny</a:t>
-            </a:r>
-            <a:r>
-              <a:rPr b="0">
-                <a:solidFill>
-                  <a:srgbClr val="263044"/>
-                </a:solidFill>
-              </a:rPr>
-              <a:t>(</a:t>
-            </a:r>
-            <a:r>
-              <a:rPr b="0">
-                <a:solidFill>
-                  <a:srgbClr val="B45309"/>
-                </a:solidFill>
-              </a:rPr>
-              <a:t>"invalid_session"</a:t>
-            </a:r>
-            <a:r>
-              <a:rPr b="0">
-                <a:solidFill>
-                  <a:srgbClr val="263044"/>
-                </a:solidFill>
-              </a:rPr>
-              <a:t>);</a:t>
+              <a:t>)</a:t>
             </a:r>
           </a:p>
           <a:p xmlns:a="http://schemas.openxmlformats.org/drawingml/2006/main">
             <a:pPr>
+              <a:lnSpc>
+                <a:spcPts val="1300"/>
+              </a:lnSpc>
               <a:buNone/>
               <a:defRPr sz="1050">
                 <a:solidFill>
@@ -8046,7 +8024,7 @@
                   <a:srgbClr val="263044"/>
                 </a:solidFill>
               </a:rPr>
-              <a:t>    </a:t>
+              <a:t>        </a:t>
             </a:r>
             <a:r>
               <a:rPr b="1">
@@ -8054,7 +8032,7 @@
                   <a:srgbClr val="0969C3"/>
                 </a:solidFill>
               </a:rPr>
-              <a:t>if</a:t>
+              <a:t>return</a:t>
             </a:r>
             <a:r>
               <a:rPr b="0">
@@ -8062,15 +8040,63 @@
                   <a:srgbClr val="263044"/>
                 </a:solidFill>
               </a:rPr>
-              <a:t> (!proof.</a:t>
+              <a:t> </a:t>
+            </a:r>
+            <a:r>
+              <a:rPr b="1">
+                <a:solidFill>
+                  <a:srgbClr val="0969C3"/>
+                </a:solidFill>
+              </a:rPr>
+              <a:t>new</a:t>
             </a:r>
             <a:r>
               <a:rPr b="0">
                 <a:solidFill>
+                  <a:srgbClr val="263044"/>
+                </a:solidFill>
+              </a:rPr>
+              <a:t>(</a:t>
+            </a:r>
+            <a:r>
+              <a:rPr b="1">
+                <a:solidFill>
+                  <a:srgbClr val="0969C3"/>
+                </a:solidFill>
+              </a:rPr>
+              <a:t>false</a:t>
+            </a:r>
+            <a:r>
+              <a:rPr b="0">
+                <a:solidFill>
+                  <a:srgbClr val="263044"/>
+                </a:solidFill>
+              </a:rPr>
+              <a:t>, </a:t>
+            </a:r>
+            <a:r>
+              <a:rPr b="1">
+                <a:solidFill>
+                  <a:srgbClr val="0969C3"/>
+                </a:solidFill>
+              </a:rPr>
+              <a:t>false</a:t>
+            </a:r>
+            <a:r>
+              <a:rPr b="0">
+                <a:solidFill>
+                  <a:srgbClr val="263044"/>
+                </a:solidFill>
+              </a:rPr>
+              <a:t>, </a:t>
+            </a:r>
+            <a:r>
+              <a:rPr b="0">
+                <a:solidFill>
                   <a:srgbClr val="7651D4"/>
                 </a:solidFill>
               </a:rPr>
-              <a:t>IsValidFor</a:t>
+              <a:t>StepUpCodes</a:t>
             </a:r>
             <a:r>
               <a:rPr b="0">
@@ -8078,7 +8104,7 @@
                   <a:srgbClr val="263044"/>
                 </a:solidFill>
               </a:rPr>
-              <a:t>(session.</a:t>
+              <a:t>.</a:t>
             </a:r>
             <a:r>
               <a:rPr b="0">
@@ -8086,7 +8112,7 @@
                   <a:srgbClr val="7651D4"/>
                 </a:solidFill>
               </a:rPr>
-              <a:t>SubjectId</a:t>
+              <a:t>SessionRevoked</a:t>
             </a:r>
             <a:r>
               <a:rPr b="0">
@@ -8094,27 +8120,14 @@
                   <a:srgbClr val="263044"/>
                 </a:solidFill>
               </a:rPr>
-              <a:t>, clock.</a:t>
-            </a:r>
-            <a:r>
-              <a:rPr b="0">
-                <a:solidFill>
-                  <a:srgbClr val="7651D4"/>
-                </a:solidFill>
-              </a:rPr>
-              <a:t>UtcNow</a:t>
-            </a:r>
-            <a:r>
-              <a:rPr b="0">
-                <a:solidFill>
-                  <a:srgbClr val="263044"/>
-                </a:solidFill>
-              </a:rPr>
-              <a:t>))</a:t>
+              <a:t>, …);</a:t>
             </a:r>
           </a:p>
           <a:p xmlns:a="http://schemas.openxmlformats.org/drawingml/2006/main">
             <a:pPr>
+              <a:lnSpc>
+                <a:spcPts val="1300"/>
+              </a:lnSpc>
               <a:buNone/>
               <a:defRPr sz="1050">
                 <a:solidFill>
@@ -8131,7 +8144,7 @@
                   <a:srgbClr val="263044"/>
                 </a:solidFill>
               </a:rPr>
-              <a:t>        </a:t>
+              <a:t>    </a:t>
             </a:r>
             <a:r>
               <a:rPr b="1">
@@ -8139,7 +8152,7 @@
                   <a:srgbClr val="0969C3"/>
                 </a:solidFill>
               </a:rPr>
-              <a:t>return</a:t>
+              <a:t>if</a:t>
             </a:r>
             <a:r>
               <a:rPr b="0">
@@ -8147,15 +8160,47 @@
                   <a:srgbClr val="263044"/>
                 </a:solidFill>
               </a:rPr>
+              <a:t> (session.</a:t>
+            </a:r>
+            <a:r>
+              <a:rPr b="0">
+                <a:solidFill>
+                  <a:srgbClr val="7651D4"/>
+                </a:solidFill>
+              </a:rPr>
+              <a:t>MfaVerifiedAt</a:t>
+            </a:r>
+            <a:r>
+              <a:rPr b="0">
+                <a:solidFill>
+                  <a:srgbClr val="263044"/>
+                </a:solidFill>
+              </a:rPr>
               <a:t> </a:t>
             </a:r>
             <a:r>
+              <a:rPr b="1">
+                <a:solidFill>
+                  <a:srgbClr val="0969C3"/>
+                </a:solidFill>
+              </a:rPr>
+              <a:t>is</a:t>
+            </a:r>
+            <a:r>
               <a:rPr b="0">
                 <a:solidFill>
-                  <a:srgbClr val="7651D4"/>
-                </a:solidFill>
-              </a:rPr>
-              <a:t>Result</a:t>
+                  <a:srgbClr val="263044"/>
+                </a:solidFill>
+              </a:rPr>
+              <a:t> </a:t>
+            </a:r>
+            <a:r>
+              <a:rPr b="1">
+                <a:solidFill>
+                  <a:srgbClr val="0969C3"/>
+                </a:solidFill>
+              </a:rPr>
+              <a:t>not</a:t>
             </a:r>
             <a:r>
               <a:rPr b="0">
@@ -8163,43 +8208,14 @@
                   <a:srgbClr val="263044"/>
                 </a:solidFill>
               </a:rPr>
-              <a:t>.</a:t>
-            </a:r>
-            <a:r>
-              <a:rPr b="0">
-                <a:solidFill>
-                  <a:srgbClr val="7651D4"/>
-                </a:solidFill>
-              </a:rPr>
-              <a:t>Deny</a:t>
-            </a:r>
-            <a:r>
-              <a:rPr b="0">
-                <a:solidFill>
-                  <a:srgbClr val="263044"/>
-                </a:solidFill>
-              </a:rPr>
-              <a:t>(</a:t>
-            </a:r>
-            <a:r>
-              <a:rPr b="0">
-                <a:solidFill>
-                  <a:srgbClr val="B45309"/>
-                </a:solidFill>
-              </a:rPr>
-              <a:t>"step_up_required"</a:t>
-            </a:r>
-            <a:r>
-              <a:rPr b="0">
-                <a:solidFill>
-                  <a:srgbClr val="263044"/>
-                </a:solidFill>
-              </a:rPr>
-              <a:t>);</a:t>
+              <a:t> { } verifiedAt)</a:t>
             </a:r>
           </a:p>
           <a:p xmlns:a="http://schemas.openxmlformats.org/drawingml/2006/main">
             <a:pPr>
+              <a:lnSpc>
+                <a:spcPts val="1300"/>
+              </a:lnSpc>
               <a:buNone/>
               <a:defRPr sz="1050">
                 <a:solidFill>
@@ -8216,7 +8232,7 @@
                   <a:srgbClr val="263044"/>
                 </a:solidFill>
               </a:rPr>
-              <a:t>    </a:t>
+              <a:t>        </a:t>
             </a:r>
             <a:r>
               <a:rPr b="1">
@@ -8224,7 +8240,7 @@
                   <a:srgbClr val="0969C3"/>
                 </a:solidFill>
               </a:rPr>
-              <a:t>if</a:t>
+              <a:t>return</a:t>
             </a:r>
             <a:r>
               <a:rPr b="0">
@@ -8232,15 +8248,63 @@
                   <a:srgbClr val="263044"/>
                 </a:solidFill>
               </a:rPr>
-              <a:t> (!session.</a:t>
+              <a:t> </a:t>
+            </a:r>
+            <a:r>
+              <a:rPr b="1">
+                <a:solidFill>
+                  <a:srgbClr val="0969C3"/>
+                </a:solidFill>
+              </a:rPr>
+              <a:t>new</a:t>
             </a:r>
             <a:r>
               <a:rPr b="0">
                 <a:solidFill>
+                  <a:srgbClr val="263044"/>
+                </a:solidFill>
+              </a:rPr>
+              <a:t>(</a:t>
+            </a:r>
+            <a:r>
+              <a:rPr b="1">
+                <a:solidFill>
+                  <a:srgbClr val="0969C3"/>
+                </a:solidFill>
+              </a:rPr>
+              <a:t>false</a:t>
+            </a:r>
+            <a:r>
+              <a:rPr b="0">
+                <a:solidFill>
+                  <a:srgbClr val="263044"/>
+                </a:solidFill>
+              </a:rPr>
+              <a:t>, </a:t>
+            </a:r>
+            <a:r>
+              <a:rPr b="1">
+                <a:solidFill>
+                  <a:srgbClr val="0969C3"/>
+                </a:solidFill>
+              </a:rPr>
+              <a:t>true</a:t>
+            </a:r>
+            <a:r>
+              <a:rPr b="0">
+                <a:solidFill>
+                  <a:srgbClr val="263044"/>
+                </a:solidFill>
+              </a:rPr>
+              <a:t>, </a:t>
+            </a:r>
+            <a:r>
+              <a:rPr b="0">
+                <a:solidFill>
                   <a:srgbClr val="7651D4"/>
                 </a:solidFill>
               </a:rPr>
-              <a:t>Has</a:t>
+              <a:t>StepUpCodes</a:t>
             </a:r>
             <a:r>
               <a:rPr b="0">
@@ -8248,15 +8312,15 @@
                   <a:srgbClr val="263044"/>
                 </a:solidFill>
               </a:rPr>
-              <a:t>(</a:t>
+              <a:t>.</a:t>
             </a:r>
             <a:r>
               <a:rPr b="0">
                 <a:solidFill>
-                  <a:srgbClr val="B45309"/>
-                </a:solidFill>
-              </a:rPr>
-              <a:t>"payment.approve"</a:t>
+                  <a:srgbClr val="7651D4"/>
+                </a:solidFill>
+              </a:rPr>
+              <a:t>MfaRequired</a:t>
             </a:r>
             <a:r>
               <a:rPr b="0">
@@ -8264,11 +8328,14 @@
                   <a:srgbClr val="263044"/>
                 </a:solidFill>
               </a:rPr>
-              <a:t>))</a:t>
+              <a:t>, …);</a:t>
             </a:r>
           </a:p>
           <a:p xmlns:a="http://schemas.openxmlformats.org/drawingml/2006/main">
             <a:pPr>
+              <a:lnSpc>
+                <a:spcPts val="1300"/>
+              </a:lnSpc>
               <a:buNone/>
               <a:defRPr sz="1050">
                 <a:solidFill>
@@ -8285,7 +8352,7 @@
                   <a:srgbClr val="263044"/>
                 </a:solidFill>
               </a:rPr>
-              <a:t>        </a:t>
+              <a:t>    </a:t>
             </a:r>
             <a:r>
               <a:rPr b="1">
@@ -8293,7 +8360,7 @@
                   <a:srgbClr val="0969C3"/>
                 </a:solidFill>
               </a:rPr>
-              <a:t>return</a:t>
+              <a:t>if</a:t>
             </a:r>
             <a:r>
               <a:rPr b="0">
@@ -8301,7 +8368,7 @@
                   <a:srgbClr val="263044"/>
                 </a:solidFill>
               </a:rPr>
-              <a:t> </a:t>
+              <a:t> (!</a:t>
             </a:r>
             <a:r>
               <a:rPr b="0">
@@ -8309,7 +8376,7 @@
                   <a:srgbClr val="7651D4"/>
                 </a:solidFill>
               </a:rPr>
-              <a:t>Result</a:t>
+              <a:t>IsFresh</a:t>
             </a:r>
             <a:r>
               <a:rPr b="0">
@@ -8317,7 +8384,7 @@
                   <a:srgbClr val="263044"/>
                 </a:solidFill>
               </a:rPr>
-              <a:t>.</a:t>
+              <a:t>(verifiedAt, operation.</a:t>
             </a:r>
             <a:r>
               <a:rPr b="0">
@@ -8325,7 +8392,7 @@
                   <a:srgbClr val="7651D4"/>
                 </a:solidFill>
               </a:rPr>
-              <a:t>Deny</a:t>
+              <a:t>MaximumMfaAge</a:t>
             </a:r>
             <a:r>
               <a:rPr b="0">
@@ -8333,27 +8400,14 @@
                   <a:srgbClr val="263044"/>
                 </a:solidFill>
               </a:rPr>
-              <a:t>(</a:t>
-            </a:r>
-            <a:r>
-              <a:rPr b="0">
-                <a:solidFill>
-                  <a:srgbClr val="B45309"/>
-                </a:solidFill>
-              </a:rPr>
-              <a:t>"missing_permission"</a:t>
-            </a:r>
-            <a:r>
-              <a:rPr b="0">
-                <a:solidFill>
-                  <a:srgbClr val="263044"/>
-                </a:solidFill>
-              </a:rPr>
-              <a:t>);</a:t>
+              <a:t>, now))</a:t>
             </a:r>
           </a:p>
           <a:p xmlns:a="http://schemas.openxmlformats.org/drawingml/2006/main">
             <a:pPr>
+              <a:lnSpc>
+                <a:spcPts val="1300"/>
+              </a:lnSpc>
               <a:buNone/>
               <a:defRPr sz="1050">
                 <a:solidFill>
@@ -8370,6 +8424,126 @@
                   <a:srgbClr val="263044"/>
                 </a:solidFill>
               </a:rPr>
+              <a:t>        </a:t>
+            </a:r>
+            <a:r>
+              <a:rPr b="1">
+                <a:solidFill>
+                  <a:srgbClr val="0969C3"/>
+                </a:solidFill>
+              </a:rPr>
+              <a:t>return</a:t>
+            </a:r>
+            <a:r>
+              <a:rPr b="0">
+                <a:solidFill>
+                  <a:srgbClr val="263044"/>
+                </a:solidFill>
+              </a:rPr>
+              <a:t> </a:t>
+            </a:r>
+            <a:r>
+              <a:rPr b="1">
+                <a:solidFill>
+                  <a:srgbClr val="0969C3"/>
+                </a:solidFill>
+              </a:rPr>
+              <a:t>new</a:t>
+            </a:r>
+            <a:r>
+              <a:rPr b="0">
+                <a:solidFill>
+                  <a:srgbClr val="263044"/>
+                </a:solidFill>
+              </a:rPr>
+              <a:t>(</a:t>
+            </a:r>
+            <a:r>
+              <a:rPr b="1">
+                <a:solidFill>
+                  <a:srgbClr val="0969C3"/>
+                </a:solidFill>
+              </a:rPr>
+              <a:t>false</a:t>
+            </a:r>
+            <a:r>
+              <a:rPr b="0">
+                <a:solidFill>
+                  <a:srgbClr val="263044"/>
+                </a:solidFill>
+              </a:rPr>
+              <a:t>, </a:t>
+            </a:r>
+            <a:r>
+              <a:rPr b="1">
+                <a:solidFill>
+                  <a:srgbClr val="0969C3"/>
+                </a:solidFill>
+              </a:rPr>
+              <a:t>true</a:t>
+            </a:r>
+            <a:r>
+              <a:rPr b="0">
+                <a:solidFill>
+                  <a:srgbClr val="263044"/>
+                </a:solidFill>
+              </a:rPr>
+              <a:t>, </a:t>
+            </a:r>
+            <a:r>
+              <a:rPr b="0">
+                <a:solidFill>
+                  <a:srgbClr val="7651D4"/>
+                </a:solidFill>
+              </a:rPr>
+              <a:t>StepUpCodes</a:t>
+            </a:r>
+            <a:r>
+              <a:rPr b="0">
+                <a:solidFill>
+                  <a:srgbClr val="263044"/>
+                </a:solidFill>
+              </a:rPr>
+              <a:t>.</a:t>
+            </a:r>
+            <a:r>
+              <a:rPr b="0">
+                <a:solidFill>
+                  <a:srgbClr val="7651D4"/>
+                </a:solidFill>
+              </a:rPr>
+              <a:t>MfaStale</a:t>
+            </a:r>
+            <a:r>
+              <a:rPr b="0">
+                <a:solidFill>
+                  <a:srgbClr val="263044"/>
+                </a:solidFill>
+              </a:rPr>
+              <a:t>, …);</a:t>
+            </a:r>
+          </a:p>
+          <a:p xmlns:a="http://schemas.openxmlformats.org/drawingml/2006/main">
+            <a:pPr>
+              <a:lnSpc>
+                <a:spcPts val="1300"/>
+              </a:lnSpc>
+              <a:buNone/>
+              <a:defRPr sz="1050">
+                <a:solidFill>
+                  <a:srgbClr val="263044"/>
+                </a:solidFill>
+                <a:latin typeface="Consolas"/>
+                <a:ea typeface="Consolas"/>
+                <a:cs typeface="Consolas"/>
+              </a:defRPr>
+            </a:pPr>
+            <a:r>
+              <a:rPr b="0">
+                <a:solidFill>
+                  <a:srgbClr val="263044"/>
+                </a:solidFill>
+              </a:rPr>
               <a:t>    </a:t>
             </a:r>
             <a:r>
@@ -8389,12 +8563,60 @@
               <a:t> </a:t>
             </a:r>
             <a:r>
+              <a:rPr b="1">
+                <a:solidFill>
+                  <a:srgbClr val="0969C3"/>
+                </a:solidFill>
+              </a:rPr>
+              <a:t>new</a:t>
+            </a:r>
+            <a:r>
               <a:rPr b="0">
                 <a:solidFill>
+                  <a:srgbClr val="263044"/>
+                </a:solidFill>
+              </a:rPr>
+              <a:t>(</a:t>
+            </a:r>
+            <a:r>
+              <a:rPr b="1">
+                <a:solidFill>
+                  <a:srgbClr val="0969C3"/>
+                </a:solidFill>
+              </a:rPr>
+              <a:t>true</a:t>
+            </a:r>
+            <a:r>
+              <a:rPr b="0">
+                <a:solidFill>
+                  <a:srgbClr val="263044"/>
+                </a:solidFill>
+              </a:rPr>
+              <a:t>, </a:t>
+            </a:r>
+            <a:r>
+              <a:rPr b="1">
+                <a:solidFill>
+                  <a:srgbClr val="0969C3"/>
+                </a:solidFill>
+              </a:rPr>
+              <a:t>false</a:t>
+            </a:r>
+            <a:r>
+              <a:rPr b="0">
+                <a:solidFill>
+                  <a:srgbClr val="263044"/>
+                </a:solidFill>
+              </a:rPr>
+              <a:t>, </a:t>
+            </a:r>
+            <a:r>
+              <a:rPr b="0">
+                <a:solidFill>
                   <a:srgbClr val="7651D4"/>
                 </a:solidFill>
               </a:rPr>
-              <a:t>Result</a:t>
+              <a:t>StepUpCodes</a:t>
             </a:r>
             <a:r>
               <a:rPr b="0">
@@ -8410,7 +8632,7 @@
                   <a:srgbClr val="7651D4"/>
                 </a:solidFill>
               </a:rPr>
-              <a:t>Ok</a:t>
+              <a:t>StepUpSatisfied</a:t>
             </a:r>
             <a:r>
               <a:rPr b="0">
@@ -8418,11 +8640,14 @@
                   <a:srgbClr val="263044"/>
                 </a:solidFill>
               </a:rPr>
-              <a:t>();</a:t>
+              <a:t>, …);</a:t>
             </a:r>
           </a:p>
           <a:p xmlns:a="http://schemas.openxmlformats.org/drawingml/2006/main">
             <a:pPr>
+              <a:lnSpc>
+                <a:spcPts val="1300"/>
+              </a:lnSpc>
               <a:buNone/>
               <a:defRPr sz="1050">
                 <a:solidFill>
@@ -9059,7 +9284,7 @@
                 <a:ea typeface="Aptos"/>
                 <a:cs typeface="Aptos"/>
               </a:rPr>
-              <a:t>Тест потврђује да опозвана сесија или промењена привилегија поништавају ранији доказ идентитета.</a:t>
+              <a:t>Тест потврђује да опозвана сесија поништава и сасвим свежу MFA потврду.</a:t>
             </a:r>
           </a:p>
         </p:txBody>
@@ -9081,7 +9306,7 @@
         <p:spPr>
           <a:xfrm xmlns:a="http://schemas.openxmlformats.org/drawingml/2006/main">
             <a:off x="666750" y="2095500"/>
-            <a:ext cx="6858000" cy="2276475"/>
+            <a:ext cx="6858000" cy="2812550"/>
           </a:xfrm>
           <a:prstGeom xmlns:a="http://schemas.openxmlformats.org/drawingml/2006/main" prst="roundRect">
             <a:avLst>
@@ -9263,7 +9488,7 @@
           <a:p xmlns:a="http://schemas.openxmlformats.org/drawingml/2006/main">
             <a:pPr algn="r">
               <a:lnSpc>
-                <a:spcPct val="100000"/>
+                <a:spcPts val="1300"/>
               </a:lnSpc>
               <a:buNone/>
               <a:defRPr sz="975" b="0">
@@ -9290,7 +9515,7 @@
           <a:p xmlns:a="http://schemas.openxmlformats.org/drawingml/2006/main">
             <a:pPr algn="r">
               <a:lnSpc>
-                <a:spcPct val="100000"/>
+                <a:spcPts val="1300"/>
               </a:lnSpc>
               <a:buNone/>
               <a:defRPr sz="975" b="0">
@@ -9317,7 +9542,7 @@
           <a:p xmlns:a="http://schemas.openxmlformats.org/drawingml/2006/main">
             <a:pPr algn="r">
               <a:lnSpc>
-                <a:spcPct val="100000"/>
+                <a:spcPts val="1300"/>
               </a:lnSpc>
               <a:buNone/>
               <a:defRPr sz="975" b="0">
@@ -9344,7 +9569,7 @@
           <a:p xmlns:a="http://schemas.openxmlformats.org/drawingml/2006/main">
             <a:pPr algn="r">
               <a:lnSpc>
-                <a:spcPct val="100000"/>
+                <a:spcPts val="1300"/>
               </a:lnSpc>
               <a:buNone/>
               <a:defRPr sz="975" b="0">
@@ -9371,7 +9596,7 @@
           <a:p xmlns:a="http://schemas.openxmlformats.org/drawingml/2006/main">
             <a:pPr algn="r">
               <a:lnSpc>
-                <a:spcPct val="100000"/>
+                <a:spcPts val="1300"/>
               </a:lnSpc>
               <a:buNone/>
               <a:defRPr sz="975" b="0">
@@ -9398,7 +9623,7 @@
           <a:p xmlns:a="http://schemas.openxmlformats.org/drawingml/2006/main">
             <a:pPr algn="r">
               <a:lnSpc>
-                <a:spcPct val="100000"/>
+                <a:spcPts val="1300"/>
               </a:lnSpc>
               <a:buNone/>
               <a:defRPr sz="975" b="0">
@@ -9425,7 +9650,7 @@
           <a:p xmlns:a="http://schemas.openxmlformats.org/drawingml/2006/main">
             <a:pPr algn="r">
               <a:lnSpc>
-                <a:spcPct val="100000"/>
+                <a:spcPts val="1300"/>
               </a:lnSpc>
               <a:buNone/>
               <a:defRPr sz="975" b="0">
@@ -9452,7 +9677,7 @@
           <a:p xmlns:a="http://schemas.openxmlformats.org/drawingml/2006/main">
             <a:pPr algn="r">
               <a:lnSpc>
-                <a:spcPct val="100000"/>
+                <a:spcPts val="1300"/>
               </a:lnSpc>
               <a:buNone/>
               <a:defRPr sz="975" b="0">
@@ -9479,7 +9704,7 @@
           <a:p xmlns:a="http://schemas.openxmlformats.org/drawingml/2006/main">
             <a:pPr algn="r">
               <a:lnSpc>
-                <a:spcPct val="100000"/>
+                <a:spcPts val="1300"/>
               </a:lnSpc>
               <a:buNone/>
               <a:defRPr sz="975" b="0">
@@ -9506,7 +9731,7 @@
           <a:p xmlns:a="http://schemas.openxmlformats.org/drawingml/2006/main">
             <a:pPr algn="r">
               <a:lnSpc>
-                <a:spcPct val="100000"/>
+                <a:spcPts val="1300"/>
               </a:lnSpc>
               <a:buNone/>
               <a:defRPr sz="975" b="0">
@@ -9530,6 +9755,87 @@
               <a:t>10</a:t>
             </a:r>
           </a:p>
+          <a:p xmlns:a="http://schemas.openxmlformats.org/drawingml/2006/main">
+            <a:pPr algn="r">
+              <a:lnSpc>
+                <a:spcPts val="1300"/>
+              </a:lnSpc>
+              <a:buNone/>
+              <a:defRPr sz="975" b="0">
+                <a:solidFill>
+                  <a:srgbClr val="8792A6"/>
+                </a:solidFill>
+                <a:latin typeface="Consolas"/>
+                <a:ea typeface="Consolas"/>
+                <a:cs typeface="Consolas"/>
+              </a:defRPr>
+            </a:pPr>
+            <a:r>
+              <a:rPr sz="975" b="0">
+                <a:solidFill>
+                  <a:srgbClr val="8792A6"/>
+                </a:solidFill>
+                <a:latin typeface="Consolas"/>
+                <a:ea typeface="Consolas"/>
+                <a:cs typeface="Consolas"/>
+              </a:rPr>
+              <a:t>11</a:t>
+            </a:r>
+          </a:p>
+          <a:p xmlns:a="http://schemas.openxmlformats.org/drawingml/2006/main">
+            <a:pPr algn="r">
+              <a:lnSpc>
+                <a:spcPts val="1300"/>
+              </a:lnSpc>
+              <a:buNone/>
+              <a:defRPr sz="975" b="0">
+                <a:solidFill>
+                  <a:srgbClr val="8792A6"/>
+                </a:solidFill>
+                <a:latin typeface="Consolas"/>
+                <a:ea typeface="Consolas"/>
+                <a:cs typeface="Consolas"/>
+              </a:defRPr>
+            </a:pPr>
+            <a:r>
+              <a:rPr sz="975" b="0">
+                <a:solidFill>
+                  <a:srgbClr val="8792A6"/>
+                </a:solidFill>
+                <a:latin typeface="Consolas"/>
+                <a:ea typeface="Consolas"/>
+                <a:cs typeface="Consolas"/>
+              </a:rPr>
+              <a:t>12</a:t>
+            </a:r>
+          </a:p>
+          <a:p xmlns:a="http://schemas.openxmlformats.org/drawingml/2006/main">
+            <a:pPr algn="r">
+              <a:lnSpc>
+                <a:spcPts val="1300"/>
+              </a:lnSpc>
+              <a:buNone/>
+              <a:defRPr sz="975" b="0">
+                <a:solidFill>
+                  <a:srgbClr val="8792A6"/>
+                </a:solidFill>
+                <a:latin typeface="Consolas"/>
+                <a:ea typeface="Consolas"/>
+                <a:cs typeface="Consolas"/>
+              </a:defRPr>
+            </a:pPr>
+            <a:r>
+              <a:rPr sz="975" b="0">
+                <a:solidFill>
+                  <a:srgbClr val="8792A6"/>
+                </a:solidFill>
+                <a:latin typeface="Consolas"/>
+                <a:ea typeface="Consolas"/>
+                <a:cs typeface="Consolas"/>
+              </a:rPr>
+              <a:t>13</a:t>
+            </a:r>
+          </a:p>
         </p:txBody>
       </p:sp>
       <p:sp>
@@ -9566,6 +9872,9 @@
           <a:lstStyle xmlns:a="http://schemas.openxmlformats.org/drawingml/2006/main"/>
           <a:p xmlns:a="http://schemas.openxmlformats.org/drawingml/2006/main">
             <a:pPr>
+              <a:lnSpc>
+                <a:spcPts val="1300"/>
+              </a:lnSpc>
               <a:buNone/>
               <a:defRPr sz="1050">
                 <a:solidFill>
@@ -9590,7 +9899,7 @@
                   <a:srgbClr val="7651D4"/>
                 </a:solidFill>
               </a:rPr>
-              <a:t>Fact</a:t>
+              <a:t>Test</a:t>
             </a:r>
             <a:r>
               <a:rPr b="0">
@@ -9603,6 +9912,9 @@
           </a:p>
           <a:p xmlns:a="http://schemas.openxmlformats.org/drawingml/2006/main">
             <a:pPr>
+              <a:lnSpc>
+                <a:spcPts val="1300"/>
+              </a:lnSpc>
               <a:buNone/>
               <a:defRPr sz="1050">
                 <a:solidFill>
@@ -9651,7 +9963,7 @@
                   <a:srgbClr val="7651D4"/>
                 </a:solidFill>
               </a:rPr>
-              <a:t>Revoked_session_cannot_use_valid_old_mfa_proof</a:t>
+              <a:t>Evaluate_WhenSessionIsRevoked_DeniesWithoutOfferingMfa</a:t>
             </a:r>
             <a:r>
               <a:rPr b="0">
@@ -9664,6 +9976,9 @@
           </a:p>
           <a:p xmlns:a="http://schemas.openxmlformats.org/drawingml/2006/main">
             <a:pPr>
+              <a:lnSpc>
+                <a:spcPts val="1300"/>
+              </a:lnSpc>
               <a:buNone/>
               <a:defRPr sz="1050">
                 <a:solidFill>
@@ -9685,6 +10000,9 @@
           </a:p>
           <a:p xmlns:a="http://schemas.openxmlformats.org/drawingml/2006/main">
             <a:pPr>
+              <a:lnSpc>
+                <a:spcPts val="1300"/>
+              </a:lnSpc>
               <a:buNone/>
               <a:defRPr sz="1050">
                 <a:solidFill>
@@ -9717,7 +10035,7 @@
                   <a:srgbClr val="263044"/>
                 </a:solidFill>
               </a:rPr>
-              <a:t> session = </a:t>
+              <a:t> decision = _policy.</a:t>
             </a:r>
             <a:r>
               <a:rPr b="0">
@@ -9725,7 +10043,7 @@
                   <a:srgbClr val="7651D4"/>
                 </a:solidFill>
               </a:rPr>
-              <a:t>Session</a:t>
+              <a:t>Evaluate</a:t>
             </a:r>
             <a:r>
               <a:rPr b="0">
@@ -9733,43 +10051,14 @@
                   <a:srgbClr val="263044"/>
                 </a:solidFill>
               </a:rPr>
-              <a:t>.</a:t>
-            </a:r>
-            <a:r>
-              <a:rPr b="0">
-                <a:solidFill>
-                  <a:srgbClr val="7651D4"/>
-                </a:solidFill>
-              </a:rPr>
-              <a:t>Revoked</a:t>
-            </a:r>
-            <a:r>
-              <a:rPr b="0">
-                <a:solidFill>
-                  <a:srgbClr val="263044"/>
-                </a:solidFill>
-              </a:rPr>
-              <a:t>(subject: </a:t>
-            </a:r>
-            <a:r>
-              <a:rPr b="0">
-                <a:solidFill>
-                  <a:srgbClr val="B45309"/>
-                </a:solidFill>
-              </a:rPr>
-              <a:t>"u-8"</a:t>
-            </a:r>
-            <a:r>
-              <a:rPr b="0">
-                <a:solidFill>
-                  <a:srgbClr val="263044"/>
-                </a:solidFill>
-              </a:rPr>
-              <a:t>);</a:t>
+              <a:t>(</a:t>
             </a:r>
           </a:p>
           <a:p xmlns:a="http://schemas.openxmlformats.org/drawingml/2006/main">
             <a:pPr>
+              <a:lnSpc>
+                <a:spcPts val="1300"/>
+              </a:lnSpc>
               <a:buNone/>
               <a:defRPr sz="1050">
                 <a:solidFill>
@@ -9786,7 +10075,71 @@
                   <a:srgbClr val="263044"/>
                 </a:solidFill>
               </a:rPr>
-              <a:t>    </a:t>
+              <a:t>        </a:t>
+            </a:r>
+            <a:r>
+              <a:rPr b="0">
+                <a:solidFill>
+                  <a:srgbClr val="7651D4"/>
+                </a:solidFill>
+              </a:rPr>
+              <a:t>Session</a:t>
+            </a:r>
+            <a:r>
+              <a:rPr b="0">
+                <a:solidFill>
+                  <a:srgbClr val="263044"/>
+                </a:solidFill>
+              </a:rPr>
+              <a:t>(</a:t>
+            </a:r>
+            <a:r>
+              <a:rPr b="0">
+                <a:solidFill>
+                  <a:srgbClr val="7651D4"/>
+                </a:solidFill>
+              </a:rPr>
+              <a:t>Now</a:t>
+            </a:r>
+            <a:r>
+              <a:rPr b="0">
+                <a:solidFill>
+                  <a:srgbClr val="263044"/>
+                </a:solidFill>
+              </a:rPr>
+              <a:t>.</a:t>
+            </a:r>
+            <a:r>
+              <a:rPr b="0">
+                <a:solidFill>
+                  <a:srgbClr val="7651D4"/>
+                </a:solidFill>
+              </a:rPr>
+              <a:t>AddMinutes</a:t>
+            </a:r>
+            <a:r>
+              <a:rPr b="0">
+                <a:solidFill>
+                  <a:srgbClr val="263044"/>
+                </a:solidFill>
+              </a:rPr>
+              <a:t>(-</a:t>
+            </a:r>
+            <a:r>
+              <a:rPr b="0">
+                <a:solidFill>
+                  <a:srgbClr val="B86A09"/>
+                </a:solidFill>
+              </a:rPr>
+              <a:t>1</a:t>
+            </a:r>
+            <a:r>
+              <a:rPr b="0">
+                <a:solidFill>
+                  <a:srgbClr val="263044"/>
+                </a:solidFill>
+              </a:rPr>
+              <a:t>), revoked: </a:t>
             </a:r>
             <a:r>
               <a:rPr b="1">
@@ -9794,7 +10147,7 @@
                   <a:srgbClr val="0969C3"/>
                 </a:solidFill>
               </a:rPr>
-              <a:t>var</a:t>
+              <a:t>true</a:t>
             </a:r>
             <a:r>
               <a:rPr b="0">
@@ -9802,7 +10155,7 @@
                   <a:srgbClr val="263044"/>
                 </a:solidFill>
               </a:rPr>
-              <a:t> proof = </a:t>
+              <a:t>), </a:t>
             </a:r>
             <a:r>
               <a:rPr b="0">
@@ -9810,7 +10163,7 @@
                   <a:srgbClr val="7651D4"/>
                 </a:solidFill>
               </a:rPr>
-              <a:t>MfaProof</a:t>
+              <a:t>Export</a:t>
             </a:r>
             <a:r>
               <a:rPr b="0">
@@ -9818,7 +10171,7 @@
                   <a:srgbClr val="263044"/>
                 </a:solidFill>
               </a:rPr>
-              <a:t>.</a:t>
+              <a:t>, </a:t>
             </a:r>
             <a:r>
               <a:rPr b="0">
@@ -9826,7 +10179,7 @@
                   <a:srgbClr val="7651D4"/>
                 </a:solidFill>
               </a:rPr>
-              <a:t>ValidFor</a:t>
+              <a:t>Now</a:t>
             </a:r>
             <a:r>
               <a:rPr b="0">
@@ -9834,27 +10187,14 @@
                   <a:srgbClr val="263044"/>
                 </a:solidFill>
               </a:rPr>
-              <a:t>(</a:t>
-            </a:r>
-            <a:r>
-              <a:rPr b="0">
-                <a:solidFill>
-                  <a:srgbClr val="B45309"/>
-                </a:solidFill>
-              </a:rPr>
-              <a:t>"u-8"</a:t>
-            </a:r>
-            <a:r>
-              <a:rPr b="0">
-                <a:solidFill>
-                  <a:srgbClr val="263044"/>
-                </a:solidFill>
-              </a:rPr>
               <a:t>);</a:t>
             </a:r>
           </a:p>
           <a:p xmlns:a="http://schemas.openxmlformats.org/drawingml/2006/main">
             <a:pPr>
+              <a:lnSpc>
+                <a:spcPts val="1300"/>
+              </a:lnSpc>
               <a:buNone/>
               <a:defRPr sz="1050">
                 <a:solidFill>
@@ -9865,14 +10205,20 @@
                 <a:cs typeface="Consolas"/>
               </a:defRPr>
             </a:pPr>
-            <a:endParaRPr b="0">
-              <a:solidFill>
-                <a:srgbClr val="263044"/>
-              </a:solidFill>
-            </a:endParaRPr>
+            <a:r>
+              <a:rPr b="0">
+                <a:solidFill>
+                  <a:srgbClr val="263044"/>
+                </a:solidFill>
+              </a:rPr>
+              <a:t> </a:t>
+            </a:r>
           </a:p>
           <a:p xmlns:a="http://schemas.openxmlformats.org/drawingml/2006/main">
             <a:pPr>
+              <a:lnSpc>
+                <a:spcPts val="1300"/>
+              </a:lnSpc>
               <a:buNone/>
               <a:defRPr sz="1050">
                 <a:solidFill>
@@ -9897,7 +10243,7 @@
                   <a:srgbClr val="0969C3"/>
                 </a:solidFill>
               </a:rPr>
-              <a:t>var</a:t>
+              <a:t>using</a:t>
             </a:r>
             <a:r>
               <a:rPr b="0">
@@ -9905,7 +10251,7 @@
                   <a:srgbClr val="263044"/>
                 </a:solidFill>
               </a:rPr>
-              <a:t> result = guard.</a:t>
+              <a:t> (</a:t>
             </a:r>
             <a:r>
               <a:rPr b="0">
@@ -9913,7 +10259,7 @@
                   <a:srgbClr val="7651D4"/>
                 </a:solidFill>
               </a:rPr>
-              <a:t>Approve</a:t>
+              <a:t>Assert</a:t>
             </a:r>
             <a:r>
               <a:rPr b="0">
@@ -9921,11 +10267,30 @@
                   <a:srgbClr val="263044"/>
                 </a:solidFill>
               </a:rPr>
-              <a:t>(session, proof);</a:t>
+              <a:t>.</a:t>
+            </a:r>
+            <a:r>
+              <a:rPr b="0">
+                <a:solidFill>
+                  <a:srgbClr val="7651D4"/>
+                </a:solidFill>
+              </a:rPr>
+              <a:t>EnterMultipleScope</a:t>
+            </a:r>
+            <a:r>
+              <a:rPr b="0">
+                <a:solidFill>
+                  <a:srgbClr val="263044"/>
+                </a:solidFill>
+              </a:rPr>
+              <a:t>())</a:t>
             </a:r>
           </a:p>
           <a:p xmlns:a="http://schemas.openxmlformats.org/drawingml/2006/main">
             <a:pPr>
+              <a:lnSpc>
+                <a:spcPts val="1300"/>
+              </a:lnSpc>
               <a:buNone/>
               <a:defRPr sz="1050">
                 <a:solidFill>
@@ -9936,14 +10301,20 @@
                 <a:cs typeface="Consolas"/>
               </a:defRPr>
             </a:pPr>
-            <a:endParaRPr b="0">
-              <a:solidFill>
-                <a:srgbClr val="263044"/>
-              </a:solidFill>
-            </a:endParaRPr>
+            <a:r>
+              <a:rPr b="0">
+                <a:solidFill>
+                  <a:srgbClr val="263044"/>
+                </a:solidFill>
+              </a:rPr>
+              <a:t>    {</a:t>
+            </a:r>
           </a:p>
           <a:p xmlns:a="http://schemas.openxmlformats.org/drawingml/2006/main">
             <a:pPr>
+              <a:lnSpc>
+                <a:spcPts val="1300"/>
+              </a:lnSpc>
               <a:buNone/>
               <a:defRPr sz="1050">
                 <a:solidFill>
@@ -9960,7 +10331,7 @@
                   <a:srgbClr val="263044"/>
                 </a:solidFill>
               </a:rPr>
-              <a:t>    result.</a:t>
+              <a:t>        </a:t>
             </a:r>
             <a:r>
               <a:rPr b="0">
@@ -9968,7 +10339,7 @@
                   <a:srgbClr val="7651D4"/>
                 </a:solidFill>
               </a:rPr>
-              <a:t>Reason</a:t>
+              <a:t>Assert</a:t>
             </a:r>
             <a:r>
               <a:rPr b="0">
@@ -9984,7 +10355,7 @@
                   <a:srgbClr val="7651D4"/>
                 </a:solidFill>
               </a:rPr>
-              <a:t>Should</a:t>
+              <a:t>That</a:t>
             </a:r>
             <a:r>
               <a:rPr b="0">
@@ -9992,7 +10363,7 @@
                   <a:srgbClr val="263044"/>
                 </a:solidFill>
               </a:rPr>
-              <a:t>().</a:t>
+              <a:t>(decision.</a:t>
             </a:r>
             <a:r>
               <a:rPr b="0">
@@ -10000,7 +10371,7 @@
                   <a:srgbClr val="7651D4"/>
                 </a:solidFill>
               </a:rPr>
-              <a:t>Be</a:t>
+              <a:t>Allowed</a:t>
             </a:r>
             <a:r>
               <a:rPr b="0">
@@ -10008,15 +10379,255 @@
                   <a:srgbClr val="263044"/>
                 </a:solidFill>
               </a:rPr>
+              <a:t>, </a:t>
+            </a:r>
+            <a:r>
+              <a:rPr b="0">
+                <a:solidFill>
+                  <a:srgbClr val="7651D4"/>
+                </a:solidFill>
+              </a:rPr>
+              <a:t>Is</a:t>
+            </a:r>
+            <a:r>
+              <a:rPr b="0">
+                <a:solidFill>
+                  <a:srgbClr val="263044"/>
+                </a:solidFill>
+              </a:rPr>
+              <a:t>.</a:t>
+            </a:r>
+            <a:r>
+              <a:rPr b="0">
+                <a:solidFill>
+                  <a:srgbClr val="7651D4"/>
+                </a:solidFill>
+              </a:rPr>
+              <a:t>False</a:t>
+            </a:r>
+            <a:r>
+              <a:rPr b="0">
+                <a:solidFill>
+                  <a:srgbClr val="263044"/>
+                </a:solidFill>
+              </a:rPr>
+              <a:t>);</a:t>
+            </a:r>
+          </a:p>
+          <a:p xmlns:a="http://schemas.openxmlformats.org/drawingml/2006/main">
+            <a:pPr>
+              <a:lnSpc>
+                <a:spcPts val="1300"/>
+              </a:lnSpc>
+              <a:buNone/>
+              <a:defRPr sz="1050">
+                <a:solidFill>
+                  <a:srgbClr val="263044"/>
+                </a:solidFill>
+                <a:latin typeface="Consolas"/>
+                <a:ea typeface="Consolas"/>
+                <a:cs typeface="Consolas"/>
+              </a:defRPr>
+            </a:pPr>
+            <a:r>
+              <a:rPr b="0">
+                <a:solidFill>
+                  <a:srgbClr val="263044"/>
+                </a:solidFill>
+              </a:rPr>
+              <a:t>        </a:t>
+            </a:r>
+            <a:r>
+              <a:rPr b="0">
+                <a:solidFill>
+                  <a:srgbClr val="7651D4"/>
+                </a:solidFill>
+              </a:rPr>
+              <a:t>Assert</a:t>
+            </a:r>
+            <a:r>
+              <a:rPr b="0">
+                <a:solidFill>
+                  <a:srgbClr val="263044"/>
+                </a:solidFill>
+              </a:rPr>
+              <a:t>.</a:t>
+            </a:r>
+            <a:r>
+              <a:rPr b="0">
+                <a:solidFill>
+                  <a:srgbClr val="7651D4"/>
+                </a:solidFill>
+              </a:rPr>
+              <a:t>That</a:t>
+            </a:r>
+            <a:r>
+              <a:rPr b="0">
+                <a:solidFill>
+                  <a:srgbClr val="263044"/>
+                </a:solidFill>
+              </a:rPr>
+              <a:t>(decision.</a:t>
+            </a:r>
+            <a:r>
+              <a:rPr b="0">
+                <a:solidFill>
+                  <a:srgbClr val="7651D4"/>
+                </a:solidFill>
+              </a:rPr>
+              <a:t>RequiresMfa</a:t>
+            </a:r>
+            <a:r>
+              <a:rPr b="0">
+                <a:solidFill>
+                  <a:srgbClr val="263044"/>
+                </a:solidFill>
+              </a:rPr>
+              <a:t>, </a:t>
+            </a:r>
+            <a:r>
+              <a:rPr b="0">
+                <a:solidFill>
+                  <a:srgbClr val="7651D4"/>
+                </a:solidFill>
+              </a:rPr>
+              <a:t>Is</a:t>
+            </a:r>
+            <a:r>
+              <a:rPr b="0">
+                <a:solidFill>
+                  <a:srgbClr val="263044"/>
+                </a:solidFill>
+              </a:rPr>
+              <a:t>.</a:t>
+            </a:r>
+            <a:r>
+              <a:rPr b="0">
+                <a:solidFill>
+                  <a:srgbClr val="7651D4"/>
+                </a:solidFill>
+              </a:rPr>
+              <a:t>False</a:t>
+            </a:r>
+            <a:r>
+              <a:rPr b="0">
+                <a:solidFill>
+                  <a:srgbClr val="263044"/>
+                </a:solidFill>
+              </a:rPr>
+              <a:t>);</a:t>
+            </a:r>
+          </a:p>
+          <a:p xmlns:a="http://schemas.openxmlformats.org/drawingml/2006/main">
+            <a:pPr>
+              <a:lnSpc>
+                <a:spcPts val="1300"/>
+              </a:lnSpc>
+              <a:buNone/>
+              <a:defRPr sz="1050">
+                <a:solidFill>
+                  <a:srgbClr val="263044"/>
+                </a:solidFill>
+                <a:latin typeface="Consolas"/>
+                <a:ea typeface="Consolas"/>
+                <a:cs typeface="Consolas"/>
+              </a:defRPr>
+            </a:pPr>
+            <a:r>
+              <a:rPr b="0">
+                <a:solidFill>
+                  <a:srgbClr val="263044"/>
+                </a:solidFill>
+              </a:rPr>
+              <a:t>        </a:t>
+            </a:r>
+            <a:r>
+              <a:rPr b="0">
+                <a:solidFill>
+                  <a:srgbClr val="7651D4"/>
+                </a:solidFill>
+              </a:rPr>
+              <a:t>Assert</a:t>
+            </a:r>
+            <a:r>
+              <a:rPr b="0">
+                <a:solidFill>
+                  <a:srgbClr val="263044"/>
+                </a:solidFill>
+              </a:rPr>
+              <a:t>.</a:t>
+            </a:r>
+            <a:r>
+              <a:rPr b="0">
+                <a:solidFill>
+                  <a:srgbClr val="7651D4"/>
+                </a:solidFill>
+              </a:rPr>
+              <a:t>That</a:t>
+            </a:r>
+            <a:r>
+              <a:rPr b="0">
+                <a:solidFill>
+                  <a:srgbClr val="263044"/>
+                </a:solidFill>
+              </a:rPr>
+              <a:t>(decision.</a:t>
+            </a:r>
+            <a:r>
+              <a:rPr b="0">
+                <a:solidFill>
+                  <a:srgbClr val="7651D4"/>
+                </a:solidFill>
+              </a:rPr>
+              <a:t>Code</a:t>
+            </a:r>
+            <a:r>
+              <a:rPr b="0">
+                <a:solidFill>
+                  <a:srgbClr val="263044"/>
+                </a:solidFill>
+              </a:rPr>
+              <a:t>, </a:t>
+            </a:r>
+            <a:r>
+              <a:rPr b="0">
+                <a:solidFill>
+                  <a:srgbClr val="7651D4"/>
+                </a:solidFill>
+              </a:rPr>
+              <a:t>Is</a:t>
+            </a:r>
+            <a:r>
+              <a:rPr b="0">
+                <a:solidFill>
+                  <a:srgbClr val="263044"/>
+                </a:solidFill>
+              </a:rPr>
+              <a:t>.</a:t>
+            </a:r>
+            <a:r>
+              <a:rPr b="0">
+                <a:solidFill>
+                  <a:srgbClr val="7651D4"/>
+                </a:solidFill>
+              </a:rPr>
+              <a:t>EqualTo</a:t>
+            </a:r>
+            <a:r>
+              <a:rPr b="0">
+                <a:solidFill>
+                  <a:srgbClr val="263044"/>
+                </a:solidFill>
+              </a:rPr>
               <a:t>(</a:t>
             </a:r>
             <a:r>
               <a:rPr b="0">
                 <a:solidFill>
-                  <a:srgbClr val="B45309"/>
-                </a:solidFill>
-              </a:rPr>
-              <a:t>"invalid_session"</a:t>
+                  <a:srgbClr val="7651D4"/>
+                </a:solidFill>
+              </a:rPr>
+              <a:t>StepUpCodes</a:t>
             </a:r>
             <a:r>
               <a:rPr b="0">
@@ -10024,11 +10635,54 @@
                   <a:srgbClr val="263044"/>
                 </a:solidFill>
               </a:rPr>
-              <a:t>);</a:t>
+              <a:t>.</a:t>
+            </a:r>
+            <a:r>
+              <a:rPr b="0">
+                <a:solidFill>
+                  <a:srgbClr val="7651D4"/>
+                </a:solidFill>
+              </a:rPr>
+              <a:t>SessionRevoked</a:t>
+            </a:r>
+            <a:r>
+              <a:rPr b="0">
+                <a:solidFill>
+                  <a:srgbClr val="263044"/>
+                </a:solidFill>
+              </a:rPr>
+              <a:t>));</a:t>
             </a:r>
           </a:p>
           <a:p xmlns:a="http://schemas.openxmlformats.org/drawingml/2006/main">
             <a:pPr>
+              <a:lnSpc>
+                <a:spcPts val="1300"/>
+              </a:lnSpc>
+              <a:buNone/>
+              <a:defRPr sz="1050">
+                <a:solidFill>
+                  <a:srgbClr val="263044"/>
+                </a:solidFill>
+                <a:latin typeface="Consolas"/>
+                <a:ea typeface="Consolas"/>
+                <a:cs typeface="Consolas"/>
+              </a:defRPr>
+            </a:pPr>
+            <a:r>
+              <a:rPr b="0">
+                <a:solidFill>
+                  <a:srgbClr val="263044"/>
+                </a:solidFill>
+              </a:rPr>
+              <a:t>    }</a:t>
+            </a:r>
+          </a:p>
+          <a:p xmlns:a="http://schemas.openxmlformats.org/drawingml/2006/main">
+            <a:pPr>
+              <a:lnSpc>
+                <a:spcPts val="1300"/>
+              </a:lnSpc>
               <a:buNone/>
               <a:defRPr sz="1050">
                 <a:solidFill>
@@ -10202,7 +10856,7 @@
                 <a:ea typeface="Aptos"/>
                 <a:cs typeface="Aptos"/>
               </a:rPr>
-              <a:t>Чак и валидан стари MFA доказ не оживљава сесију која је у међувремену опозвана.</a:t>
+              <a:t>Ни MFA потврда стара један минут не оживљава сесију која је опозвана.</a:t>
             </a:r>
           </a:p>
         </p:txBody>
@@ -10359,7 +11013,7 @@
                 <a:ea typeface="Aptos"/>
                 <a:cs typeface="Aptos"/>
               </a:rPr>
-              <a:t>Тест мења једну чињеницу и очекује јасан, стабилан разлог одбијања.</a:t>
+              <a:t>Одлука одбија радњу и не нуди нову MFA потврду, јер сесија више не важи.</a:t>
             </a:r>
           </a:p>
         </p:txBody>
@@ -10869,7 +11523,7 @@
           <a:p xmlns:a="http://schemas.openxmlformats.org/drawingml/2006/main">
             <a:pPr algn="r">
               <a:lnSpc>
-                <a:spcPct val="100000"/>
+                <a:spcPts val="1300"/>
               </a:lnSpc>
               <a:buNone/>
               <a:defRPr sz="1050" b="0">
@@ -10896,7 +11550,7 @@
           <a:p xmlns:a="http://schemas.openxmlformats.org/drawingml/2006/main">
             <a:pPr algn="r">
               <a:lnSpc>
-                <a:spcPct val="100000"/>
+                <a:spcPts val="1300"/>
               </a:lnSpc>
               <a:buNone/>
               <a:defRPr sz="1050" b="0">
@@ -10923,7 +11577,7 @@
           <a:p xmlns:a="http://schemas.openxmlformats.org/drawingml/2006/main">
             <a:pPr algn="r">
               <a:lnSpc>
-                <a:spcPct val="100000"/>
+                <a:spcPts val="1300"/>
               </a:lnSpc>
               <a:buNone/>
               <a:defRPr sz="1050" b="0">
@@ -10950,7 +11604,7 @@
           <a:p xmlns:a="http://schemas.openxmlformats.org/drawingml/2006/main">
             <a:pPr algn="r">
               <a:lnSpc>
-                <a:spcPct val="100000"/>
+                <a:spcPts val="1300"/>
               </a:lnSpc>
               <a:buNone/>
               <a:defRPr sz="1050" b="0">
@@ -10977,7 +11631,7 @@
           <a:p xmlns:a="http://schemas.openxmlformats.org/drawingml/2006/main">
             <a:pPr algn="r">
               <a:lnSpc>
-                <a:spcPct val="100000"/>
+                <a:spcPts val="1300"/>
               </a:lnSpc>
               <a:buNone/>
               <a:defRPr sz="1050" b="0">
@@ -11004,7 +11658,7 @@
           <a:p xmlns:a="http://schemas.openxmlformats.org/drawingml/2006/main">
             <a:pPr algn="r">
               <a:lnSpc>
-                <a:spcPct val="100000"/>
+                <a:spcPts val="1300"/>
               </a:lnSpc>
               <a:buNone/>
               <a:defRPr sz="1050" b="0">
@@ -11031,7 +11685,7 @@
           <a:p xmlns:a="http://schemas.openxmlformats.org/drawingml/2006/main">
             <a:pPr algn="r">
               <a:lnSpc>
-                <a:spcPct val="100000"/>
+                <a:spcPts val="1300"/>
               </a:lnSpc>
               <a:buNone/>
               <a:defRPr sz="1050" b="0">
@@ -11058,7 +11712,7 @@
           <a:p xmlns:a="http://schemas.openxmlformats.org/drawingml/2006/main">
             <a:pPr algn="r">
               <a:lnSpc>
-                <a:spcPct val="100000"/>
+                <a:spcPts val="1300"/>
               </a:lnSpc>
               <a:buNone/>
               <a:defRPr sz="1050" b="0">
@@ -11118,6 +11772,9 @@
           <a:lstStyle xmlns:a="http://schemas.openxmlformats.org/drawingml/2006/main"/>
           <a:p xmlns:a="http://schemas.openxmlformats.org/drawingml/2006/main">
             <a:pPr>
+              <a:lnSpc>
+                <a:spcPts val="1300"/>
+              </a:lnSpc>
               <a:buNone/>
               <a:defRPr sz="1125">
                 <a:solidFill>
@@ -11139,6 +11796,9 @@
           </a:p>
           <a:p xmlns:a="http://schemas.openxmlformats.org/drawingml/2006/main">
             <a:pPr>
+              <a:lnSpc>
+                <a:spcPts val="1300"/>
+              </a:lnSpc>
               <a:buNone/>
               <a:defRPr sz="1125">
                 <a:solidFill>
@@ -11192,6 +11852,9 @@
           </a:p>
           <a:p xmlns:a="http://schemas.openxmlformats.org/drawingml/2006/main">
             <a:pPr>
+              <a:lnSpc>
+                <a:spcPts val="1300"/>
+              </a:lnSpc>
               <a:buNone/>
               <a:defRPr sz="1125">
                 <a:solidFill>
@@ -11245,6 +11908,9 @@
           </a:p>
           <a:p xmlns:a="http://schemas.openxmlformats.org/drawingml/2006/main">
             <a:pPr>
+              <a:lnSpc>
+                <a:spcPts val="1300"/>
+              </a:lnSpc>
               <a:buNone/>
               <a:defRPr sz="1125">
                 <a:solidFill>
@@ -11298,6 +11964,9 @@
           </a:p>
           <a:p xmlns:a="http://schemas.openxmlformats.org/drawingml/2006/main">
             <a:pPr>
+              <a:lnSpc>
+                <a:spcPts val="1300"/>
+              </a:lnSpc>
               <a:buNone/>
               <a:defRPr sz="1125">
                 <a:solidFill>
@@ -11351,6 +12020,9 @@
           </a:p>
           <a:p xmlns:a="http://schemas.openxmlformats.org/drawingml/2006/main">
             <a:pPr>
+              <a:lnSpc>
+                <a:spcPts val="1300"/>
+              </a:lnSpc>
               <a:buNone/>
               <a:defRPr sz="1125">
                 <a:solidFill>
@@ -11404,6 +12076,9 @@
           </a:p>
           <a:p xmlns:a="http://schemas.openxmlformats.org/drawingml/2006/main">
             <a:pPr>
+              <a:lnSpc>
+                <a:spcPts val="1300"/>
+              </a:lnSpc>
               <a:buNone/>
               <a:defRPr sz="1125">
                 <a:solidFill>
@@ -11449,6 +12124,9 @@
           </a:p>
           <a:p xmlns:a="http://schemas.openxmlformats.org/drawingml/2006/main">
             <a:pPr>
+              <a:lnSpc>
+                <a:spcPts val="1300"/>
+              </a:lnSpc>
               <a:buNone/>
               <a:defRPr sz="1125">
                 <a:solidFill>
@@ -19940,7 +20618,7 @@
                 <a:ea typeface="Aptos"/>
                 <a:cs typeface="Aptos"/>
               </a:rPr>
-              <a:t>Сесија може изгубити важност пре планираног истека.</a:t>
+              <a:t>Пријава потврђује идентитет у једном тренутку; не говори шта субјекат сме да ради касније.</a:t>
             </a:r>
           </a:p>
         </p:txBody>
@@ -20164,7 +20842,7 @@
                 <a:ea typeface="Aptos"/>
                 <a:cs typeface="Aptos"/>
               </a:rPr>
-              <a:t>Сесија је привремени доказ контекста, не трајна потврда поверења.</a:t>
+              <a:t>Вишефакторска потврда вреди за субјекта који ју је дао и за ограничено време.</a:t>
             </a:r>
           </a:p>
         </p:txBody>
@@ -20388,7 +21066,7 @@
                 <a:ea typeface="Aptos"/>
                 <a:cs typeface="Aptos"/>
               </a:rPr>
-              <a:t>Истек ограничава трајање поверења чак и када нема видљивог инцидента.</a:t>
+              <a:t>Систем бележи време и начин потврде, али никада саму лозинку или код.</a:t>
             </a:r>
           </a:p>
         </p:txBody>
@@ -20699,7 +21377,7 @@
                 <a:ea typeface="Aptos"/>
                 <a:cs typeface="Aptos"/>
               </a:rPr>
-              <a:t>Која радња заслужује додатну потврду идентитета и који догађај би требало да опозове постојећу сесију?</a:t>
+              <a:t>Шта ваш систем зна о кориснику одмах после пријаве, а шта тек треба да провери?</a:t>
             </a:r>
           </a:p>
         </p:txBody>
@@ -21168,7 +21846,7 @@
                 <a:ea typeface="Aptos"/>
                 <a:cs typeface="Aptos"/>
               </a:rPr>
-              <a:t>Додатна потврда прати ризик радње, не само тип корисника.</a:t>
+              <a:t>Сесија је привремени доказ контекста, а не трајна потврда поверења.</a:t>
             </a:r>
           </a:p>
         </p:txBody>
@@ -21392,7 +22070,7 @@
                 <a:ea typeface="Aptos"/>
                 <a:cs typeface="Aptos"/>
               </a:rPr>
-              <a:t>Step-up аутентикација има смисла када се ризик радње промени, а не као произвољна препрека за све кориснике.</a:t>
+              <a:t>Сервер при сваком захтеву проверава да ли сесија и даље важи.</a:t>
             </a:r>
           </a:p>
         </p:txBody>
@@ -21616,7 +22294,7 @@
                 <a:ea typeface="Aptos"/>
                 <a:cs typeface="Aptos"/>
               </a:rPr>
-              <a:t>Опозив реагује на конкретну промену ризика и не чека да сесија природно нестане.</a:t>
+              <a:t>Запис о сесији чува када је настала, када је потврђена и када је престала да важи.</a:t>
             </a:r>
           </a:p>
         </p:txBody>
@@ -21927,7 +22605,7 @@
                 <a:ea typeface="Aptos"/>
                 <a:cs typeface="Aptos"/>
               </a:rPr>
-              <a:t>Која радња заслужује додатну потврду идентитета и који догађај би требало да опозове постојећу сесију?</a:t>
+              <a:t>Који податак о сесији сервер мора да провери пре сваке осетљиве радње?</a:t>
             </a:r>
           </a:p>
         </p:txBody>
@@ -22396,7 +23074,7 @@
                 <a:ea typeface="Aptos"/>
                 <a:cs typeface="Aptos"/>
               </a:rPr>
-              <a:t>Сервисни идентитет има мали, јасно оправдан опсег, као и људски идентитет.</a:t>
+              <a:t>Додатну потврду тражи конкретна ризична радња, а не само тип корисника.</a:t>
             </a:r>
           </a:p>
         </p:txBody>
@@ -22620,7 +23298,7 @@
                 <a:ea typeface="Aptos"/>
                 <a:cs typeface="Aptos"/>
               </a:rPr>
-              <a:t>Сервисни налог добија исти третман као корисник: најмањи потребан опсег, рок важења и контролисану ротацију тајне.</a:t>
+              <a:t>Свака радња одређује колико стара потврда идентитета сме да буде.</a:t>
             </a:r>
           </a:p>
         </p:txBody>
@@ -22844,7 +23522,7 @@
                 <a:ea typeface="Aptos"/>
                 <a:cs typeface="Aptos"/>
               </a:rPr>
-              <a:t>Додатни фактор доказује присуство или поседовање независног средства, а не понавља само исту лозинку.</a:t>
+              <a:t>Одлука бележи да ли је тражена нова потврда и из ког разлога.</a:t>
             </a:r>
           </a:p>
         </p:txBody>
@@ -23155,7 +23833,7 @@
                 <a:ea typeface="Aptos"/>
                 <a:cs typeface="Aptos"/>
               </a:rPr>
-              <a:t>Која радња заслужује додатну потврду идентитета и који догађај би требало да опозове постојећу сесију?</a:t>
+              <a:t>Која радња у вашем систему заслужује додатну потврду и колико свежа она мора бити?</a:t>
             </a:r>
           </a:p>
         </p:txBody>
@@ -23848,7 +24526,7 @@
                 <a:ea typeface="Aptos"/>
                 <a:cs typeface="Aptos"/>
               </a:rPr>
-              <a:t>Опозив реагује на конкретну промену ризика и не чека да сесија природно нестане.</a:t>
+              <a:t>Опозив има предност над сваким ранијим доказом идентитета.</a:t>
             </a:r>
           </a:p>
         </p:txBody>
@@ -24072,7 +24750,7 @@
                 <a:ea typeface="Aptos"/>
                 <a:cs typeface="Aptos"/>
               </a:rPr>
-              <a:t>Додатни фактор доказује присуство или поседовање независног средства, а не понавља само исту лозинку.</a:t>
+              <a:t>Опозив и истек остављају траг: ко је прекинуо приступ, када и зашто.</a:t>
             </a:r>
           </a:p>
         </p:txBody>
@@ -24383,7 +25061,7 @@
                 <a:ea typeface="Aptos"/>
                 <a:cs typeface="Aptos"/>
               </a:rPr>
-              <a:t>Која радња заслужује додатну потврду идентитета и који догађај би требало да опозове постојећу сесију?</a:t>
+              <a:t>Који догађај у вашем систему мора одмах да опозове постојећу сесију?</a:t>
             </a:r>
           </a:p>
         </p:txBody>
